--- a/slides/odmr_474nm_talk.pptx
+++ b/slides/odmr_474nm_talk.pptx
@@ -15,6 +15,8 @@
     <p:sldId id="260" r:id="rId12"/>
     <p:sldId id="261" r:id="rId13"/>
     <p:sldId id="262" r:id="rId14"/>
+    <p:sldId id="263" r:id="rId15"/>
+    <p:sldId id="264" r:id="rId16"/>
   </p:sldIdLst>
   <p:sldSz cx="12192000" cy="6858000"/>
   <p:notesSz cx="6858000" cy="9144000"/>
@@ -639,7 +641,7 @@
           <a:lstStyle/>
           <a:p>
             <a:r>
-              <a:t>0:40–1:40  マップ時間 ∝ 画素数/η²。感度は指標ではなく通貨。</a:t>
+              <a:t>0:40–1:50  専門外向けの動機。狙う圧力帯 → 抵抗では決着しない → センサーをアンビル内に作る、の 3 段。</a:t>
             </a:r>
           </a:p>
         </p:txBody>
@@ -709,7 +711,7 @@
           <a:lstStyle/>
           <a:p>
             <a:r>
-              <a:t>1:40–3:00  2 つの端が窓を挟み込む。常圧曲線は近似が粗い旨を先に断る。</a:t>
+              <a:t>1:50–2:40  マップ時間 ∝ 画素数/η²。感度は指標ではなく通貨。</a:t>
             </a:r>
           </a:p>
         </p:txBody>
@@ -779,7 +781,7 @@
           <a:lstStyle/>
           <a:p>
             <a:r>
-              <a:t>3:00–4:20  答え。窓の広さと 473 nm の位置を見せる。</a:t>
+              <a:t>2:40–3:50  2 つの端が窓を挟み込む。常圧曲線は近似が粗い旨を先に断る。</a:t>
             </a:r>
           </a:p>
         </p:txBody>
@@ -849,7 +851,7 @@
           <a:lstStyle/>
           <a:p>
             <a:r>
-              <a:t>4:20–5:20  相殺 → 現象論非依存。ゼロが並ぶ絵が主張そのもの。</a:t>
+              <a:t>3:50–4:50  答え。窓の広さと 473 nm の位置を見せる。</a:t>
             </a:r>
           </a:p>
         </p:txBody>
@@ -919,7 +921,7 @@
           <a:lstStyle/>
           <a:p>
             <a:r>
-              <a:t>5:20–6:40  反証条件。符号変化は単一圧力の系統誤差では作れない。</a:t>
+              <a:t>4:50–5:10  相殺 → 現象論非依存。ゼロが並ぶ絵が主張そのもの。</a:t>
             </a:r>
           </a:p>
         </p:txBody>
@@ -989,7 +991,147 @@
           <a:lstStyle/>
           <a:p>
             <a:r>
-              <a:t>6:40–8:00  適用条件とまとめ。校正は 474 nm の検証ではなく絶対感度・パワー依存・f₋ の直接測定のために行う。</a:t>
+              <a:t>5:10–6:10  再現。較正は 2 定数だけ、独立データは自由度なしで合う。</a:t>
+            </a:r>
+          </a:p>
+        </p:txBody>
+      </p:sp>
+      <p:sp>
+        <p:nvSpPr>
+          <p:cNvPr id="4" name="Slide Number Placeholder 3"/>
+          <p:cNvSpPr>
+            <a:spLocks noGrp="1"/>
+          </p:cNvSpPr>
+          <p:nvPr>
+            <p:ph type="sldNum" idx="5" sz="quarter"/>
+          </p:nvPr>
+        </p:nvSpPr>
+        <p:spPr/>
+      </p:sp>
+    </p:spTree>
+  </p:cSld>
+  <p:clrMapOvr>
+    <a:masterClrMapping/>
+  </p:clrMapOvr>
+</p:notes>
+</file>
+
+<file path=ppt/notesSlides/notesSlide8.xml><?xml version="1.0" encoding="utf-8"?>
+<p:notes xmlns:a="http://schemas.openxmlformats.org/drawingml/2006/main" xmlns:p="http://schemas.openxmlformats.org/presentationml/2006/main" xmlns:r="http://schemas.openxmlformats.org/officeDocument/2006/relationships">
+  <p:cSld>
+    <p:spTree>
+      <p:nvGrpSpPr>
+        <p:cNvPr id="1" name=""/>
+        <p:cNvGrpSpPr/>
+        <p:nvPr/>
+      </p:nvGrpSpPr>
+      <p:grpSpPr>
+        <a:xfrm>
+          <a:off x="0" y="0"/>
+          <a:ext cx="0" cy="0"/>
+          <a:chOff x="0" y="0"/>
+          <a:chExt cx="0" cy="0"/>
+        </a:xfrm>
+      </p:grpSpPr>
+      <p:sp>
+        <p:nvSpPr>
+          <p:cNvPr id="2" name="Slide Image Placeholder 1"/>
+          <p:cNvSpPr>
+            <a:spLocks noGrp="1"/>
+          </p:cNvSpPr>
+          <p:nvPr>
+            <p:ph type="sldImg" idx="2"/>
+          </p:nvPr>
+        </p:nvSpPr>
+        <p:spPr/>
+      </p:sp>
+      <p:sp>
+        <p:nvSpPr>
+          <p:cNvPr id="3" name="Notes Placeholder 2"/>
+          <p:cNvSpPr>
+            <a:spLocks noGrp="1"/>
+          </p:cNvSpPr>
+          <p:nvPr>
+            <p:ph type="body" idx="3" sz="quarter"/>
+          </p:nvPr>
+        </p:nvSpPr>
+        <p:spPr/>
+        <p:txBody>
+          <a:bodyPr/>
+          <a:lstStyle/>
+          <a:p>
+            <a:r>
+              <a:t>6:10–7:10  反証条件。符号変化は単一圧力の系統誤差では作れない。</a:t>
+            </a:r>
+          </a:p>
+        </p:txBody>
+      </p:sp>
+      <p:sp>
+        <p:nvSpPr>
+          <p:cNvPr id="4" name="Slide Number Placeholder 3"/>
+          <p:cNvSpPr>
+            <a:spLocks noGrp="1"/>
+          </p:cNvSpPr>
+          <p:nvPr>
+            <p:ph type="sldNum" idx="5" sz="quarter"/>
+          </p:nvPr>
+        </p:nvSpPr>
+        <p:spPr/>
+      </p:sp>
+    </p:spTree>
+  </p:cSld>
+  <p:clrMapOvr>
+    <a:masterClrMapping/>
+  </p:clrMapOvr>
+</p:notes>
+</file>
+
+<file path=ppt/notesSlides/notesSlide9.xml><?xml version="1.0" encoding="utf-8"?>
+<p:notes xmlns:a="http://schemas.openxmlformats.org/drawingml/2006/main" xmlns:p="http://schemas.openxmlformats.org/presentationml/2006/main" xmlns:r="http://schemas.openxmlformats.org/officeDocument/2006/relationships">
+  <p:cSld>
+    <p:spTree>
+      <p:nvGrpSpPr>
+        <p:cNvPr id="1" name=""/>
+        <p:cNvGrpSpPr/>
+        <p:nvPr/>
+      </p:nvGrpSpPr>
+      <p:grpSpPr>
+        <a:xfrm>
+          <a:off x="0" y="0"/>
+          <a:ext cx="0" cy="0"/>
+          <a:chOff x="0" y="0"/>
+          <a:chExt cx="0" cy="0"/>
+        </a:xfrm>
+      </p:grpSpPr>
+      <p:sp>
+        <p:nvSpPr>
+          <p:cNvPr id="2" name="Slide Image Placeholder 1"/>
+          <p:cNvSpPr>
+            <a:spLocks noGrp="1"/>
+          </p:cNvSpPr>
+          <p:nvPr>
+            <p:ph type="sldImg" idx="2"/>
+          </p:nvPr>
+        </p:nvSpPr>
+        <p:spPr/>
+      </p:sp>
+      <p:sp>
+        <p:nvSpPr>
+          <p:cNvPr id="3" name="Notes Placeholder 2"/>
+          <p:cNvSpPr>
+            <a:spLocks noGrp="1"/>
+          </p:cNvSpPr>
+          <p:nvPr>
+            <p:ph type="body" idx="3" sz="quarter"/>
+          </p:nvPr>
+        </p:nvSpPr>
+        <p:spPr/>
+        <p:txBody>
+          <a:bodyPr/>
+          <a:lstStyle/>
+          <a:p>
+            <a:r>
+              <a:t>7:10–8:00  適用条件とまとめ。校正は 474 nm の検証ではなく絶対感度・パワー依存・f₋ の直接測定のために行う。</a:t>
             </a:r>
           </a:p>
         </p:txBody>
@@ -9277,6 +9419,661 @@
                 <a:ea typeface="Yu Gothic"/>
                 <a:cs typeface="Yu Gothic"/>
               </a:rPr>
+              <a:t>なぜ 120 GPa で局所磁気イメージングなのか</a:t>
+            </a:r>
+          </a:p>
+        </p:txBody>
+      </p:sp>
+      <p:graphicFrame>
+        <p:nvGraphicFramePr>
+          <p:cNvPr id="3" name="Table 2"/>
+          <p:cNvGraphicFramePr>
+            <a:graphicFrameLocks noGrp="1"/>
+          </p:cNvGraphicFramePr>
+          <p:nvPr/>
+        </p:nvGraphicFramePr>
+        <p:xfrm>
+          <a:off x="502920" y="1234440"/>
+          <a:ext cx="5074919" cy="2286000"/>
+        </p:xfrm>
+        <a:graphic>
+          <a:graphicData uri="http://schemas.openxmlformats.org/drawingml/2006/table">
+            <a:tbl>
+              <a:tblPr firstRow="1">
+                <a:tableStyleId>{5C22544A-7EE6-4342-B048-85BDC9FD1C3A}</a:tableStyleId>
+              </a:tblPr>
+              <a:tblGrid>
+                <a:gridCol w="1874519"/>
+                <a:gridCol w="1600200"/>
+                <a:gridCol w="1600200"/>
+              </a:tblGrid>
+              <a:tr h="457200">
+                <a:tc>
+                  <a:txBody>
+                    <a:bodyPr wrap="square"/>
+                    <a:lstStyle/>
+                    <a:p>
+                      <a:r>
+                        <a:rPr sz="1400" b="1">
+                          <a:solidFill>
+                            <a:srgbClr val="FFFFFF"/>
+                          </a:solidFill>
+                          <a:latin typeface="Yu Gothic"/>
+                          <a:ea typeface="Yu Gothic"/>
+                          <a:cs typeface="Yu Gothic"/>
+                        </a:rPr>
+                        <a:t>超水素化物</a:t>
+                      </a:r>
+                    </a:p>
+                  </a:txBody>
+                  <a:tcPr anchor="ctr" marL="73152" marR="73152" marT="36576" marB="36576">
+                    <a:solidFill>
+                      <a:srgbClr val="1C3177"/>
+                    </a:solidFill>
+                  </a:tcPr>
+                </a:tc>
+                <a:tc>
+                  <a:txBody>
+                    <a:bodyPr wrap="square"/>
+                    <a:lstStyle/>
+                    <a:p>
+                      <a:r>
+                        <a:rPr sz="1400" b="1">
+                          <a:solidFill>
+                            <a:srgbClr val="FFFFFF"/>
+                          </a:solidFill>
+                          <a:latin typeface="Yu Gothic"/>
+                          <a:ea typeface="Yu Gothic"/>
+                          <a:cs typeface="Yu Gothic"/>
+                        </a:rPr>
+                        <a:t>転移温度</a:t>
+                      </a:r>
+                    </a:p>
+                  </a:txBody>
+                  <a:tcPr anchor="ctr" marL="73152" marR="73152" marT="36576" marB="36576">
+                    <a:solidFill>
+                      <a:srgbClr val="1C3177"/>
+                    </a:solidFill>
+                  </a:tcPr>
+                </a:tc>
+                <a:tc>
+                  <a:txBody>
+                    <a:bodyPr wrap="square"/>
+                    <a:lstStyle/>
+                    <a:p>
+                      <a:r>
+                        <a:rPr sz="1400" b="1">
+                          <a:solidFill>
+                            <a:srgbClr val="FFFFFF"/>
+                          </a:solidFill>
+                          <a:latin typeface="Yu Gothic"/>
+                          <a:ea typeface="Yu Gothic"/>
+                          <a:cs typeface="Yu Gothic"/>
+                        </a:rPr>
+                        <a:t>合成圧力</a:t>
+                      </a:r>
+                    </a:p>
+                  </a:txBody>
+                  <a:tcPr anchor="ctr" marL="73152" marR="73152" marT="36576" marB="36576">
+                    <a:solidFill>
+                      <a:srgbClr val="1C3177"/>
+                    </a:solidFill>
+                  </a:tcPr>
+                </a:tc>
+              </a:tr>
+              <a:tr h="457200">
+                <a:tc>
+                  <a:txBody>
+                    <a:bodyPr wrap="square"/>
+                    <a:lstStyle/>
+                    <a:p>
+                      <a:r>
+                        <a:rPr sz="1400" b="0">
+                          <a:solidFill>
+                            <a:srgbClr val="101426"/>
+                          </a:solidFill>
+                          <a:latin typeface="Yu Gothic"/>
+                          <a:ea typeface="Yu Gothic"/>
+                          <a:cs typeface="Yu Gothic"/>
+                        </a:rPr>
+                        <a:t>H₃S</a:t>
+                      </a:r>
+                    </a:p>
+                  </a:txBody>
+                  <a:tcPr anchor="ctr" marL="73152" marR="73152" marT="36576" marB="36576">
+                    <a:noFill/>
+                  </a:tcPr>
+                </a:tc>
+                <a:tc>
+                  <a:txBody>
+                    <a:bodyPr wrap="square"/>
+                    <a:lstStyle/>
+                    <a:p>
+                      <a:r>
+                        <a:rPr sz="1400" b="0">
+                          <a:solidFill>
+                            <a:srgbClr val="101426"/>
+                          </a:solidFill>
+                          <a:latin typeface="Yu Gothic"/>
+                          <a:ea typeface="Yu Gothic"/>
+                          <a:cs typeface="Yu Gothic"/>
+                        </a:rPr>
+                        <a:t>203 K</a:t>
+                      </a:r>
+                    </a:p>
+                  </a:txBody>
+                  <a:tcPr anchor="ctr" marL="73152" marR="73152" marT="36576" marB="36576">
+                    <a:noFill/>
+                  </a:tcPr>
+                </a:tc>
+                <a:tc>
+                  <a:txBody>
+                    <a:bodyPr wrap="square"/>
+                    <a:lstStyle/>
+                    <a:p>
+                      <a:r>
+                        <a:rPr sz="1400" b="0">
+                          <a:solidFill>
+                            <a:srgbClr val="101426"/>
+                          </a:solidFill>
+                          <a:latin typeface="Yu Gothic"/>
+                          <a:ea typeface="Yu Gothic"/>
+                          <a:cs typeface="Yu Gothic"/>
+                        </a:rPr>
+                        <a:t>155 GPa</a:t>
+                      </a:r>
+                    </a:p>
+                  </a:txBody>
+                  <a:tcPr anchor="ctr" marL="73152" marR="73152" marT="36576" marB="36576">
+                    <a:noFill/>
+                  </a:tcPr>
+                </a:tc>
+              </a:tr>
+              <a:tr h="457200">
+                <a:tc>
+                  <a:txBody>
+                    <a:bodyPr wrap="square"/>
+                    <a:lstStyle/>
+                    <a:p>
+                      <a:r>
+                        <a:rPr sz="1400" b="0">
+                          <a:solidFill>
+                            <a:srgbClr val="101426"/>
+                          </a:solidFill>
+                          <a:latin typeface="Yu Gothic"/>
+                          <a:ea typeface="Yu Gothic"/>
+                          <a:cs typeface="Yu Gothic"/>
+                        </a:rPr>
+                        <a:t>LaH₁₀</a:t>
+                      </a:r>
+                    </a:p>
+                  </a:txBody>
+                  <a:tcPr anchor="ctr" marL="73152" marR="73152" marT="36576" marB="36576">
+                    <a:noFill/>
+                  </a:tcPr>
+                </a:tc>
+                <a:tc>
+                  <a:txBody>
+                    <a:bodyPr wrap="square"/>
+                    <a:lstStyle/>
+                    <a:p>
+                      <a:r>
+                        <a:rPr sz="1400" b="0">
+                          <a:solidFill>
+                            <a:srgbClr val="101426"/>
+                          </a:solidFill>
+                          <a:latin typeface="Yu Gothic"/>
+                          <a:ea typeface="Yu Gothic"/>
+                          <a:cs typeface="Yu Gothic"/>
+                        </a:rPr>
+                        <a:t>250–260 K</a:t>
+                      </a:r>
+                    </a:p>
+                  </a:txBody>
+                  <a:tcPr anchor="ctr" marL="73152" marR="73152" marT="36576" marB="36576">
+                    <a:noFill/>
+                  </a:tcPr>
+                </a:tc>
+                <a:tc>
+                  <a:txBody>
+                    <a:bodyPr wrap="square"/>
+                    <a:lstStyle/>
+                    <a:p>
+                      <a:r>
+                        <a:rPr sz="1400" b="0">
+                          <a:solidFill>
+                            <a:srgbClr val="101426"/>
+                          </a:solidFill>
+                          <a:latin typeface="Yu Gothic"/>
+                          <a:ea typeface="Yu Gothic"/>
+                          <a:cs typeface="Yu Gothic"/>
+                        </a:rPr>
+                        <a:t>170 GPa</a:t>
+                      </a:r>
+                    </a:p>
+                  </a:txBody>
+                  <a:tcPr anchor="ctr" marL="73152" marR="73152" marT="36576" marB="36576">
+                    <a:noFill/>
+                  </a:tcPr>
+                </a:tc>
+              </a:tr>
+              <a:tr h="457200">
+                <a:tc>
+                  <a:txBody>
+                    <a:bodyPr wrap="square"/>
+                    <a:lstStyle/>
+                    <a:p>
+                      <a:r>
+                        <a:rPr sz="1400" b="0">
+                          <a:solidFill>
+                            <a:srgbClr val="101426"/>
+                          </a:solidFill>
+                          <a:latin typeface="Yu Gothic"/>
+                          <a:ea typeface="Yu Gothic"/>
+                          <a:cs typeface="Yu Gothic"/>
+                        </a:rPr>
+                        <a:t>CeH₉</a:t>
+                      </a:r>
+                    </a:p>
+                  </a:txBody>
+                  <a:tcPr anchor="ctr" marL="73152" marR="73152" marT="36576" marB="36576">
+                    <a:noFill/>
+                  </a:tcPr>
+                </a:tc>
+                <a:tc>
+                  <a:txBody>
+                    <a:bodyPr wrap="square"/>
+                    <a:lstStyle/>
+                    <a:p>
+                      <a:r>
+                        <a:rPr sz="1400" b="0">
+                          <a:solidFill>
+                            <a:srgbClr val="101426"/>
+                          </a:solidFill>
+                          <a:latin typeface="Yu Gothic"/>
+                          <a:ea typeface="Yu Gothic"/>
+                          <a:cs typeface="Yu Gothic"/>
+                        </a:rPr>
+                        <a:t>≤ 115 K</a:t>
+                      </a:r>
+                    </a:p>
+                  </a:txBody>
+                  <a:tcPr anchor="ctr" marL="73152" marR="73152" marT="36576" marB="36576">
+                    <a:noFill/>
+                  </a:tcPr>
+                </a:tc>
+                <a:tc>
+                  <a:txBody>
+                    <a:bodyPr wrap="square"/>
+                    <a:lstStyle/>
+                    <a:p>
+                      <a:r>
+                        <a:rPr sz="1400" b="0">
+                          <a:solidFill>
+                            <a:srgbClr val="101426"/>
+                          </a:solidFill>
+                          <a:latin typeface="Yu Gothic"/>
+                          <a:ea typeface="Yu Gothic"/>
+                          <a:cs typeface="Yu Gothic"/>
+                        </a:rPr>
+                        <a:t>80–100 GPa</a:t>
+                      </a:r>
+                    </a:p>
+                  </a:txBody>
+                  <a:tcPr anchor="ctr" marL="73152" marR="73152" marT="36576" marB="36576">
+                    <a:noFill/>
+                  </a:tcPr>
+                </a:tc>
+              </a:tr>
+              <a:tr h="457200">
+                <a:tc>
+                  <a:txBody>
+                    <a:bodyPr wrap="square"/>
+                    <a:lstStyle/>
+                    <a:p>
+                      <a:r>
+                        <a:rPr sz="1400" b="1">
+                          <a:solidFill>
+                            <a:srgbClr val="101426"/>
+                          </a:solidFill>
+                          <a:latin typeface="Yu Gothic"/>
+                          <a:ea typeface="Yu Gothic"/>
+                          <a:cs typeface="Yu Gothic"/>
+                        </a:rPr>
+                        <a:t>(La,Ce)H₉</a:t>
+                      </a:r>
+                    </a:p>
+                  </a:txBody>
+                  <a:tcPr anchor="ctr" marL="73152" marR="73152" marT="36576" marB="36576">
+                    <a:solidFill>
+                      <a:srgbClr val="E8EAF1"/>
+                    </a:solidFill>
+                  </a:tcPr>
+                </a:tc>
+                <a:tc>
+                  <a:txBody>
+                    <a:bodyPr wrap="square"/>
+                    <a:lstStyle/>
+                    <a:p>
+                      <a:r>
+                        <a:rPr sz="1400" b="1">
+                          <a:solidFill>
+                            <a:srgbClr val="101426"/>
+                          </a:solidFill>
+                          <a:latin typeface="Yu Gothic"/>
+                          <a:ea typeface="Yu Gothic"/>
+                          <a:cs typeface="Yu Gothic"/>
+                        </a:rPr>
+                        <a:t>148–178 K</a:t>
+                      </a:r>
+                    </a:p>
+                  </a:txBody>
+                  <a:tcPr anchor="ctr" marL="73152" marR="73152" marT="36576" marB="36576">
+                    <a:solidFill>
+                      <a:srgbClr val="E8EAF1"/>
+                    </a:solidFill>
+                  </a:tcPr>
+                </a:tc>
+                <a:tc>
+                  <a:txBody>
+                    <a:bodyPr wrap="square"/>
+                    <a:lstStyle/>
+                    <a:p>
+                      <a:r>
+                        <a:rPr sz="1400" b="1">
+                          <a:solidFill>
+                            <a:srgbClr val="101426"/>
+                          </a:solidFill>
+                          <a:latin typeface="Yu Gothic"/>
+                          <a:ea typeface="Yu Gothic"/>
+                          <a:cs typeface="Yu Gothic"/>
+                        </a:rPr>
+                        <a:t>97–172 GPa</a:t>
+                      </a:r>
+                    </a:p>
+                  </a:txBody>
+                  <a:tcPr anchor="ctr" marL="73152" marR="73152" marT="36576" marB="36576">
+                    <a:solidFill>
+                      <a:srgbClr val="E8EAF1"/>
+                    </a:solidFill>
+                  </a:tcPr>
+                </a:tc>
+              </a:tr>
+            </a:tbl>
+          </a:graphicData>
+        </a:graphic>
+      </p:graphicFrame>
+      <p:sp>
+        <p:nvSpPr>
+          <p:cNvPr id="4" name="TextBox 3"/>
+          <p:cNvSpPr txBox="1"/>
+          <p:nvPr/>
+        </p:nvSpPr>
+        <p:spPr>
+          <a:xfrm>
+            <a:off x="502920" y="3703320"/>
+            <a:ext cx="5074920" cy="1280160"/>
+          </a:xfrm>
+          <a:prstGeom prst="rect">
+            <a:avLst/>
+          </a:prstGeom>
+          <a:noFill/>
+        </p:spPr>
+        <p:txBody>
+          <a:bodyPr wrap="square" lIns="0" rIns="0" tIns="0" bIns="0">
+            <a:spAutoFit/>
+          </a:bodyPr>
+          <a:lstStyle/>
+          <a:p>
+            <a:pPr>
+              <a:lnSpc>
+                <a:spcPct val="125000"/>
+              </a:lnSpc>
+              <a:spcAft>
+                <a:spcPts val="1000"/>
+              </a:spcAft>
+            </a:pPr>
+            <a:r>
+              <a:rPr sz="1600" b="0">
+                <a:solidFill>
+                  <a:srgbClr val="101426"/>
+                </a:solidFill>
+                <a:latin typeface="Yu Gothic"/>
+                <a:ea typeface="Yu Gothic"/>
+                <a:cs typeface="Yu Gothic"/>
+              </a:rPr>
+              <a:t>最高の T</a:t>
+            </a:r>
+            <a:r>
+              <a:rPr sz="1600" b="0" baseline="-25000">
+                <a:solidFill>
+                  <a:srgbClr val="101426"/>
+                </a:solidFill>
+                <a:latin typeface="Yu Gothic"/>
+                <a:ea typeface="Yu Gothic"/>
+                <a:cs typeface="Yu Gothic"/>
+              </a:rPr>
+              <a:t>c</a:t>
+            </a:r>
+            <a:r>
+              <a:rPr sz="1600" b="0">
+                <a:solidFill>
+                  <a:srgbClr val="101426"/>
+                </a:solidFill>
+                <a:latin typeface="Yu Gothic"/>
+                <a:ea typeface="Yu Gothic"/>
+                <a:cs typeface="Yu Gothic"/>
+              </a:rPr>
+              <a:t> は最高の圧力にはない。実験の現実味がある超水素化物は 100 GPa 前後に集中する。</a:t>
+            </a:r>
+          </a:p>
+        </p:txBody>
+      </p:sp>
+      <p:sp>
+        <p:nvSpPr>
+          <p:cNvPr id="5" name="TextBox 4"/>
+          <p:cNvSpPr txBox="1"/>
+          <p:nvPr/>
+        </p:nvSpPr>
+        <p:spPr>
+          <a:xfrm>
+            <a:off x="6492240" y="1234440"/>
+            <a:ext cx="5212079" cy="4754880"/>
+          </a:xfrm>
+          <a:prstGeom prst="rect">
+            <a:avLst/>
+          </a:prstGeom>
+          <a:noFill/>
+        </p:spPr>
+        <p:txBody>
+          <a:bodyPr wrap="square" lIns="0" rIns="0" tIns="0" bIns="0">
+            <a:spAutoFit/>
+          </a:bodyPr>
+          <a:lstStyle/>
+          <a:p>
+            <a:pPr>
+              <a:lnSpc>
+                <a:spcPct val="125000"/>
+              </a:lnSpc>
+              <a:spcAft>
+                <a:spcPts val="1000"/>
+              </a:spcAft>
+            </a:pPr>
+            <a:r>
+              <a:rPr sz="1700" b="1">
+                <a:solidFill>
+                  <a:srgbClr val="101426"/>
+                </a:solidFill>
+                <a:latin typeface="Yu Gothic"/>
+                <a:ea typeface="Yu Gothic"/>
+                <a:cs typeface="Yu Gothic"/>
+              </a:rPr>
+              <a:t>試料が小さすぎる。</a:t>
+            </a:r>
+            <a:r>
+              <a:rPr sz="1700" b="0">
+                <a:solidFill>
+                  <a:srgbClr val="101426"/>
+                </a:solidFill>
+                <a:latin typeface="Yu Gothic"/>
+                <a:ea typeface="Yu Gothic"/>
+                <a:cs typeface="Yu Gothic"/>
+              </a:rPr>
+              <a:t>120 GPa のキュレットは数十 µm、試料体積は pL。バルク磁化測定ではアンビルとガスケットの背景から分離できない。</a:t>
+            </a:r>
+          </a:p>
+          <a:p>
+            <a:pPr>
+              <a:lnSpc>
+                <a:spcPct val="125000"/>
+              </a:lnSpc>
+              <a:spcAft>
+                <a:spcPts val="1000"/>
+              </a:spcAft>
+            </a:pPr>
+            <a:r>
+              <a:rPr sz="1700" b="1">
+                <a:solidFill>
+                  <a:srgbClr val="101426"/>
+                </a:solidFill>
+                <a:latin typeface="Yu Gothic"/>
+                <a:ea typeface="Yu Gothic"/>
+                <a:cs typeface="Yu Gothic"/>
+              </a:rPr>
+              <a:t>抵抗の落下だけでは決着しない。</a:t>
+            </a:r>
+            <a:r>
+              <a:rPr sz="1700" b="0">
+                <a:solidFill>
+                  <a:srgbClr val="101426"/>
+                </a:solidFill>
+                <a:latin typeface="Yu Gothic"/>
+                <a:ea typeface="Yu Gothic"/>
+                <a:cs typeface="Yu Gothic"/>
+              </a:rPr>
+              <a:t>必要なのは磁束排除そのものの観測であり、局所・空間分解された磁気測定が決着をつける測定になった。</a:t>
+            </a:r>
+          </a:p>
+          <a:p>
+            <a:pPr>
+              <a:lnSpc>
+                <a:spcPct val="125000"/>
+              </a:lnSpc>
+              <a:spcAft>
+                <a:spcPts val="1000"/>
+              </a:spcAft>
+            </a:pPr>
+            <a:r>
+              <a:rPr sz="1700" b="1">
+                <a:solidFill>
+                  <a:srgbClr val="101426"/>
+                </a:solidFill>
+                <a:latin typeface="Yu Gothic"/>
+                <a:ea typeface="Yu Gothic"/>
+                <a:cs typeface="Yu Gothic"/>
+              </a:rPr>
+              <a:t>探針はアンビルの内側に作る。</a:t>
+            </a:r>
+            <a:r>
+              <a:rPr sz="1700" b="0">
+                <a:solidFill>
+                  <a:srgbClr val="101426"/>
+                </a:solidFill>
+                <a:latin typeface="Yu Gothic"/>
+                <a:ea typeface="Yu Gothic"/>
+                <a:cs typeface="Yu Gothic"/>
+              </a:rPr>
+              <a:t>キュレット表面の数十 nm 下に注入された NV は試料から µm の距離にあり、同じ圧力を経験する。ODMR が局所磁場と局所応力を同時に読み出す。</a:t>
+            </a:r>
+          </a:p>
+        </p:txBody>
+      </p:sp>
+      <p:sp>
+        <p:nvSpPr>
+          <p:cNvPr id="6" name="TextBox 5"/>
+          <p:cNvSpPr txBox="1"/>
+          <p:nvPr/>
+        </p:nvSpPr>
+        <p:spPr>
+          <a:xfrm>
+            <a:off x="502920" y="6327648"/>
+            <a:ext cx="8686800" cy="274320"/>
+          </a:xfrm>
+          <a:prstGeom prst="rect">
+            <a:avLst/>
+          </a:prstGeom>
+          <a:noFill/>
+        </p:spPr>
+        <p:txBody>
+          <a:bodyPr wrap="square" lIns="0" rIns="0" tIns="0" bIns="0">
+            <a:spAutoFit/>
+          </a:bodyPr>
+          <a:lstStyle/>
+          <a:p>
+            <a:pPr>
+              <a:lnSpc>
+                <a:spcPct val="125000"/>
+              </a:lnSpc>
+              <a:spcAft>
+                <a:spcPts val="0"/>
+              </a:spcAft>
+            </a:pPr>
+            <a:r>
+              <a:rPr sz="900" b="0">
+                <a:solidFill>
+                  <a:srgbClr val="6E7488"/>
+                </a:solidFill>
+                <a:latin typeface="Yu Gothic"/>
+                <a:ea typeface="Yu Gothic"/>
+                <a:cs typeface="Yu Gothic"/>
+              </a:rPr>
+              <a:t>A. P. Drozdov et al., Nature 525, 73 (2015) / 569, 528 (2019);  N. P. Salke et al., Nat. Commun. 10, 4453 (2019);  J. Bi et al., Nat. Commun. 13, 5952 (2022);  P. Bhattacharyya et al., Nature 627, 73 (2024).</a:t>
+            </a:r>
+          </a:p>
+        </p:txBody>
+      </p:sp>
+    </p:spTree>
+  </p:cSld>
+  <p:clrMapOvr>
+    <a:masterClrMapping/>
+  </p:clrMapOvr>
+</p:sld>
+</file>
+
+<file path=ppt/slides/slide3.xml><?xml version="1.0" encoding="utf-8"?>
+<p:sld xmlns:a="http://schemas.openxmlformats.org/drawingml/2006/main" xmlns:p="http://schemas.openxmlformats.org/presentationml/2006/main" xmlns:r="http://schemas.openxmlformats.org/officeDocument/2006/relationships">
+  <p:cSld>
+    <p:spTree>
+      <p:nvGrpSpPr>
+        <p:cNvPr id="1" name=""/>
+        <p:cNvGrpSpPr/>
+        <p:nvPr/>
+      </p:nvGrpSpPr>
+      <p:grpSpPr/>
+      <p:sp>
+        <p:nvSpPr>
+          <p:cNvPr id="2" name="Title 1"/>
+          <p:cNvSpPr>
+            <a:spLocks noGrp="1"/>
+          </p:cNvSpPr>
+          <p:nvPr>
+            <p:ph type="title"/>
+          </p:nvPr>
+        </p:nvSpPr>
+        <p:spPr/>
+        <p:txBody>
+          <a:bodyPr wrap="square"/>
+          <a:lstStyle/>
+          <a:p>
+            <a:r>
+              <a:rPr sz="2600" b="1">
+                <a:solidFill>
+                  <a:srgbClr val="1C3177"/>
+                </a:solidFill>
+                <a:latin typeface="Yu Gothic"/>
+                <a:ea typeface="Yu Gothic"/>
+                <a:cs typeface="Yu Gothic"/>
+              </a:rPr>
               <a:t>感度が空間分解能と (P, T) 点数を決める</a:t>
             </a:r>
           </a:p>
@@ -9693,7 +10490,7 @@
 </p:sld>
 </file>
 
-<file path=ppt/slides/slide3.xml><?xml version="1.0" encoding="utf-8"?>
+<file path=ppt/slides/slide4.xml><?xml version="1.0" encoding="utf-8"?>
 <p:sld xmlns:a="http://schemas.openxmlformats.org/drawingml/2006/main" xmlns:p="http://schemas.openxmlformats.org/presentationml/2006/main" xmlns:r="http://schemas.openxmlformats.org/officeDocument/2006/relationships">
   <p:cSld>
     <p:spTree>
@@ -9937,7 +10734,7 @@
 </p:sld>
 </file>
 
-<file path=ppt/slides/slide4.xml><?xml version="1.0" encoding="utf-8"?>
+<file path=ppt/slides/slide5.xml><?xml version="1.0" encoding="utf-8"?>
 <p:sld xmlns:a="http://schemas.openxmlformats.org/drawingml/2006/main" xmlns:p="http://schemas.openxmlformats.org/presentationml/2006/main" xmlns:r="http://schemas.openxmlformats.org/officeDocument/2006/relationships">
   <p:cSld>
     <p:spTree>
@@ -10471,7 +11268,7 @@
 </p:sld>
 </file>
 
-<file path=ppt/slides/slide5.xml><?xml version="1.0" encoding="utf-8"?>
+<file path=ppt/slides/slide6.xml><?xml version="1.0" encoding="utf-8"?>
 <p:sld xmlns:a="http://schemas.openxmlformats.org/drawingml/2006/main" xmlns:p="http://schemas.openxmlformats.org/presentationml/2006/main" xmlns:r="http://schemas.openxmlformats.org/officeDocument/2006/relationships">
   <p:cSld>
     <p:spTree>
@@ -10702,7 +11499,7 @@
                 <a:ea typeface="Yu Gothic"/>
                 <a:cs typeface="Yu Gothic"/>
               </a:rPr>
-              <a:t>追加調整なしで、0–150 GPa・4 波長にわたる既発表 26 件を再現。</a:t>
+              <a:t>答えを決めているのは ZPL 位置と電子格子結合 — どちらも他人が測った量である。</a:t>
             </a:r>
           </a:p>
         </p:txBody>
@@ -10759,7 +11556,262 @@
 </p:sld>
 </file>
 
-<file path=ppt/slides/slide6.xml><?xml version="1.0" encoding="utf-8"?>
+<file path=ppt/slides/slide7.xml><?xml version="1.0" encoding="utf-8"?>
+<p:sld xmlns:a="http://schemas.openxmlformats.org/drawingml/2006/main" xmlns:p="http://schemas.openxmlformats.org/presentationml/2006/main" xmlns:r="http://schemas.openxmlformats.org/officeDocument/2006/relationships">
+  <p:cSld>
+    <p:spTree>
+      <p:nvGrpSpPr>
+        <p:cNvPr id="1" name=""/>
+        <p:cNvGrpSpPr/>
+        <p:nvPr/>
+      </p:nvGrpSpPr>
+      <p:grpSpPr/>
+      <p:sp>
+        <p:nvSpPr>
+          <p:cNvPr id="2" name="Title 1"/>
+          <p:cNvSpPr>
+            <a:spLocks noGrp="1"/>
+          </p:cNvSpPr>
+          <p:nvPr>
+            <p:ph type="title"/>
+          </p:nvPr>
+        </p:nvSpPr>
+        <p:spPr/>
+        <p:txBody>
+          <a:bodyPr wrap="square"/>
+          <a:lstStyle/>
+          <a:p>
+            <a:r>
+              <a:rPr sz="2600" b="1">
+                <a:solidFill>
+                  <a:srgbClr val="1C3177"/>
+                </a:solidFill>
+                <a:latin typeface="Yu Gothic"/>
+                <a:ea typeface="Yu Gothic"/>
+                <a:cs typeface="Yu Gothic"/>
+              </a:rPr>
+              <a:t>先行実験を、追加調整なしで再現する</a:t>
+            </a:r>
+          </a:p>
+        </p:txBody>
+      </p:sp>
+      <p:pic>
+        <p:nvPicPr>
+          <p:cNvPr id="3" name="Picture 2" descr="repro_contrast_st.png"/>
+          <p:cNvPicPr>
+            <a:picLocks noChangeAspect="1"/>
+          </p:cNvPicPr>
+          <p:nvPr/>
+        </p:nvPicPr>
+        <p:blipFill>
+          <a:blip r:embed="rId2"/>
+          <a:stretch>
+            <a:fillRect/>
+          </a:stretch>
+        </p:blipFill>
+        <p:spPr>
+          <a:xfrm>
+            <a:off x="411480" y="1325880"/>
+            <a:ext cx="7040880" cy="4169566"/>
+          </a:xfrm>
+          <a:prstGeom prst="rect">
+            <a:avLst/>
+          </a:prstGeom>
+        </p:spPr>
+      </p:pic>
+      <p:sp>
+        <p:nvSpPr>
+          <p:cNvPr id="4" name="TextBox 3"/>
+          <p:cNvSpPr txBox="1"/>
+          <p:nvPr/>
+        </p:nvSpPr>
+        <p:spPr>
+          <a:xfrm>
+            <a:off x="7726679" y="1417320"/>
+            <a:ext cx="3977639" cy="4389120"/>
+          </a:xfrm>
+          <a:prstGeom prst="rect">
+            <a:avLst/>
+          </a:prstGeom>
+          <a:noFill/>
+        </p:spPr>
+        <p:txBody>
+          <a:bodyPr wrap="square" lIns="0" rIns="0" tIns="0" bIns="0">
+            <a:spAutoFit/>
+          </a:bodyPr>
+          <a:lstStyle/>
+          <a:p>
+            <a:pPr>
+              <a:lnSpc>
+                <a:spcPct val="125000"/>
+              </a:lnSpc>
+              <a:spcAft>
+                <a:spcPts val="1000"/>
+              </a:spcAft>
+            </a:pPr>
+            <a:r>
+              <a:rPr sz="1700" b="1">
+                <a:solidFill>
+                  <a:srgbClr val="101426"/>
+                </a:solidFill>
+                <a:latin typeface="Yu Gothic"/>
+                <a:ea typeface="Yu Gothic"/>
+                <a:cs typeface="Yu Gothic"/>
+              </a:rPr>
+              <a:t>較正に使ったのは Dai 2022 の 3 点だけ</a:t>
+            </a:r>
+            <a:r>
+              <a:rPr sz="1700" b="0">
+                <a:solidFill>
+                  <a:srgbClr val="101426"/>
+                </a:solidFill>
+                <a:latin typeface="Yu Gothic"/>
+                <a:ea typeface="Yu Gothic"/>
+                <a:cs typeface="Yu Gothic"/>
+              </a:rPr>
+              <a:t>（定数 2 個）。</a:t>
+            </a:r>
+          </a:p>
+          <a:p>
+            <a:pPr>
+              <a:lnSpc>
+                <a:spcPct val="125000"/>
+              </a:lnSpc>
+              <a:spcAft>
+                <a:spcPts val="1000"/>
+              </a:spcAft>
+            </a:pPr>
+            <a:r>
+              <a:rPr sz="1700" b="0">
+                <a:solidFill>
+                  <a:srgbClr val="101426"/>
+                </a:solidFill>
+                <a:latin typeface="Yu Gothic"/>
+                <a:ea typeface="Yu Gothic"/>
+                <a:cs typeface="Yu Gothic"/>
+              </a:rPr>
+              <a:t>Hilberer 2023 のマイクロピラーは、試料形状も励起波長も異なる独立データ。自由パラメータを残さずに </a:t>
+            </a:r>
+            <a:r>
+              <a:rPr sz="1700" b="1">
+                <a:solidFill>
+                  <a:srgbClr val="1C3177"/>
+                </a:solidFill>
+                <a:latin typeface="Yu Gothic"/>
+                <a:ea typeface="Yu Gothic"/>
+                <a:cs typeface="Yu Gothic"/>
+              </a:rPr>
+              <a:t>×0.6–1.2</a:t>
+            </a:r>
+            <a:r>
+              <a:rPr sz="1700" b="0">
+                <a:solidFill>
+                  <a:srgbClr val="101426"/>
+                </a:solidFill>
+                <a:latin typeface="Yu Gothic"/>
+                <a:ea typeface="Yu Gothic"/>
+                <a:cs typeface="Yu Gothic"/>
+              </a:rPr>
+              <a:t> で一致する。</a:t>
+            </a:r>
+          </a:p>
+          <a:p>
+            <a:pPr>
+              <a:lnSpc>
+                <a:spcPct val="125000"/>
+              </a:lnSpc>
+              <a:spcAft>
+                <a:spcPts val="1000"/>
+              </a:spcAft>
+            </a:pPr>
+            <a:r>
+              <a:rPr sz="1700" b="0">
+                <a:solidFill>
+                  <a:srgbClr val="101426"/>
+                </a:solidFill>
+                <a:latin typeface="Yu Gothic"/>
+                <a:ea typeface="Yu Gothic"/>
+                <a:cs typeface="Yu Gothic"/>
+              </a:rPr>
+              <a:t>定性的な再現も同じモデルから出る：17 GPa で 405 nm 共鳴は現れず 100 GPa で現れる／50 GPa では 450 nm に優位がない／励起を 532 → 488 → 457 nm と下げる運用順序。</a:t>
+            </a:r>
+          </a:p>
+          <a:p>
+            <a:pPr>
+              <a:lnSpc>
+                <a:spcPct val="125000"/>
+              </a:lnSpc>
+              <a:spcAft>
+                <a:spcPts val="1000"/>
+              </a:spcAft>
+            </a:pPr>
+            <a:r>
+              <a:rPr sz="1700" b="0">
+                <a:solidFill>
+                  <a:srgbClr val="101426"/>
+                </a:solidFill>
+                <a:latin typeface="Yu Gothic"/>
+                <a:ea typeface="Yu Gothic"/>
+                <a:cs typeface="Yu Gothic"/>
+              </a:rPr>
+              <a:t>0–150 GPa・4 波長で 26/26。うち較正 4 件、null 結果 1 件、未再現 1 件は OPEN と申告。</a:t>
+            </a:r>
+          </a:p>
+        </p:txBody>
+      </p:sp>
+      <p:sp>
+        <p:nvSpPr>
+          <p:cNvPr id="5" name="TextBox 4"/>
+          <p:cNvSpPr txBox="1"/>
+          <p:nvPr/>
+        </p:nvSpPr>
+        <p:spPr>
+          <a:xfrm>
+            <a:off x="502920" y="6327648"/>
+            <a:ext cx="8686800" cy="274320"/>
+          </a:xfrm>
+          <a:prstGeom prst="rect">
+            <a:avLst/>
+          </a:prstGeom>
+          <a:noFill/>
+        </p:spPr>
+        <p:txBody>
+          <a:bodyPr wrap="square" lIns="0" rIns="0" tIns="0" bIns="0">
+            <a:spAutoFit/>
+          </a:bodyPr>
+          <a:lstStyle/>
+          <a:p>
+            <a:pPr>
+              <a:lnSpc>
+                <a:spcPct val="125000"/>
+              </a:lnSpc>
+              <a:spcAft>
+                <a:spcPts val="0"/>
+              </a:spcAft>
+            </a:pPr>
+            <a:r>
+              <a:rPr sz="900" b="0">
+                <a:solidFill>
+                  <a:srgbClr val="6E7488"/>
+                </a:solidFill>
+                <a:latin typeface="Yu Gothic"/>
+                <a:ea typeface="Yu Gothic"/>
+                <a:cs typeface="Yu Gothic"/>
+              </a:rPr>
+              <a:t>J.-H. Dai et al., Chin. Phys. Lett. 39, 117601 (2022);  A. Hilberer et al., PRB 107, L220102 (2023);  P. Bhattacharyya, PhD thesis, UC Berkeley (2022).</a:t>
+            </a:r>
+          </a:p>
+        </p:txBody>
+      </p:sp>
+    </p:spTree>
+  </p:cSld>
+  <p:clrMapOvr>
+    <a:masterClrMapping/>
+  </p:clrMapOvr>
+</p:sld>
+</file>
+
+<file path=ppt/slides/slide8.xml><?xml version="1.0" encoding="utf-8"?>
 <p:sld xmlns:a="http://schemas.openxmlformats.org/drawingml/2006/main" xmlns:p="http://schemas.openxmlformats.org/presentationml/2006/main" xmlns:r="http://schemas.openxmlformats.org/officeDocument/2006/relationships">
   <p:cSld>
     <p:spTree>
@@ -11003,7 +12055,7 @@
 </p:sld>
 </file>
 
-<file path=ppt/slides/slide7.xml><?xml version="1.0" encoding="utf-8"?>
+<file path=ppt/slides/slide9.xml><?xml version="1.0" encoding="utf-8"?>
 <p:sld xmlns:a="http://schemas.openxmlformats.org/drawingml/2006/main" xmlns:p="http://schemas.openxmlformats.org/presentationml/2006/main" xmlns:r="http://schemas.openxmlformats.org/officeDocument/2006/relationships">
   <p:cSld>
     <p:spTree>

--- a/slides/odmr_474nm_talk.pptx
+++ b/slides/odmr_474nm_talk.pptx
@@ -641,7 +641,7 @@
           <a:lstStyle/>
           <a:p>
             <a:r>
-              <a:t>0:40–1:50  専門外向けの動機。狙う圧力帯 → 抵抗では決着しない → センサーをアンビル内に作る、の 3 段。</a:t>
+              <a:t>0:40–1:50  DAC とは何かを図で見せる。狙う圧力帯 → 試料が小さすぎる → 抵抗では決着しない、の 3 段。</a:t>
             </a:r>
           </a:p>
         </p:txBody>
@@ -711,7 +711,7 @@
           <a:lstStyle/>
           <a:p>
             <a:r>
-              <a:t>1:50–2:40  マップ時間 ∝ 画素数/η²。感度は指標ではなく通貨。</a:t>
+              <a:t>1:50–2:40  探針はアンビル内。既に撮れている実測を見せ、マップ時間 ∝ 画素数/η² で感度が通貨だと言う。</a:t>
             </a:r>
           </a:p>
         </p:txBody>
@@ -9419,22 +9419,90 @@
                 <a:ea typeface="Yu Gothic"/>
                 <a:cs typeface="Yu Gothic"/>
               </a:rPr>
-              <a:t>なぜ 120 GPa で局所磁気イメージングなのか</a:t>
+              <a:t>試料は 2 枚のダイヤモンドの先端にある</a:t>
+            </a:r>
+          </a:p>
+        </p:txBody>
+      </p:sp>
+      <p:pic>
+        <p:nvPicPr>
+          <p:cNvPr id="3" name="Picture 2" descr="lit_dac_schematic.png"/>
+          <p:cNvPicPr>
+            <a:picLocks noChangeAspect="1"/>
+          </p:cNvPicPr>
+          <p:nvPr/>
+        </p:nvPicPr>
+        <p:blipFill>
+          <a:blip r:embed="rId2"/>
+          <a:stretch>
+            <a:fillRect/>
+          </a:stretch>
+        </p:blipFill>
+        <p:spPr>
+          <a:xfrm>
+            <a:off x="822960" y="1188720"/>
+            <a:ext cx="2331720" cy="4309019"/>
+          </a:xfrm>
+          <a:prstGeom prst="rect">
+            <a:avLst/>
+          </a:prstGeom>
+        </p:spPr>
+      </p:pic>
+      <p:sp>
+        <p:nvSpPr>
+          <p:cNvPr id="4" name="TextBox 3"/>
+          <p:cNvSpPr txBox="1"/>
+          <p:nvPr/>
+        </p:nvSpPr>
+        <p:spPr>
+          <a:xfrm>
+            <a:off x="502920" y="5532120"/>
+            <a:ext cx="3200400" cy="731520"/>
+          </a:xfrm>
+          <a:prstGeom prst="rect">
+            <a:avLst/>
+          </a:prstGeom>
+          <a:noFill/>
+        </p:spPr>
+        <p:txBody>
+          <a:bodyPr wrap="square" lIns="0" rIns="0" tIns="0" bIns="0">
+            <a:spAutoFit/>
+          </a:bodyPr>
+          <a:lstStyle/>
+          <a:p>
+            <a:pPr>
+              <a:lnSpc>
+                <a:spcPct val="125000"/>
+              </a:lnSpc>
+              <a:spcAft>
+                <a:spcPts val="1000"/>
+              </a:spcAft>
+            </a:pPr>
+            <a:r>
+              <a:rPr sz="1400" b="0">
+                <a:solidFill>
+                  <a:srgbClr val="6E7488"/>
+                </a:solidFill>
+                <a:latin typeface="Yu Gothic"/>
+                <a:ea typeface="Yu Gothic"/>
+                <a:cs typeface="Yu Gothic"/>
+              </a:rPr>
+              <a:t>キュレット径 ~100 µm、試料は pL。</a:t>
             </a:r>
           </a:p>
         </p:txBody>
       </p:sp>
       <p:graphicFrame>
         <p:nvGraphicFramePr>
-          <p:cNvPr id="3" name="Table 2"/>
+          <p:cNvPr id="5" name="Table 4"/>
           <p:cNvGraphicFramePr>
             <a:graphicFrameLocks noGrp="1"/>
           </p:cNvGraphicFramePr>
           <p:nvPr/>
         </p:nvGraphicFramePr>
         <p:xfrm>
-          <a:off x="502920" y="1234440"/>
-          <a:ext cx="5074919" cy="2286000"/>
+          <a:off x="4069080" y="1188720"/>
+          <a:ext cx="3977640" cy="2103120"/>
         </p:xfrm>
         <a:graphic>
           <a:graphicData uri="http://schemas.openxmlformats.org/drawingml/2006/table">
@@ -9443,18 +9511,18 @@
                 <a:tableStyleId>{5C22544A-7EE6-4342-B048-85BDC9FD1C3A}</a:tableStyleId>
               </a:tblPr>
               <a:tblGrid>
-                <a:gridCol w="1874519"/>
-                <a:gridCol w="1600200"/>
-                <a:gridCol w="1600200"/>
+                <a:gridCol w="1508760"/>
+                <a:gridCol w="1234440"/>
+                <a:gridCol w="1234440"/>
               </a:tblGrid>
-              <a:tr h="457200">
+              <a:tr h="420624">
                 <a:tc>
                   <a:txBody>
                     <a:bodyPr wrap="square"/>
                     <a:lstStyle/>
                     <a:p>
                       <a:r>
-                        <a:rPr sz="1400" b="1">
+                        <a:rPr sz="1300" b="1">
                           <a:solidFill>
                             <a:srgbClr val="FFFFFF"/>
                           </a:solidFill>
@@ -9478,7 +9546,7 @@
                     <a:lstStyle/>
                     <a:p>
                       <a:r>
-                        <a:rPr sz="1400" b="1">
+                        <a:rPr sz="1300" b="1">
                           <a:solidFill>
                             <a:srgbClr val="FFFFFF"/>
                           </a:solidFill>
@@ -9502,7 +9570,7 @@
                     <a:lstStyle/>
                     <a:p>
                       <a:r>
-                        <a:rPr sz="1400" b="1">
+                        <a:rPr sz="1300" b="1">
                           <a:solidFill>
                             <a:srgbClr val="FFFFFF"/>
                           </a:solidFill>
@@ -9521,14 +9589,14 @@
                   </a:tcPr>
                 </a:tc>
               </a:tr>
-              <a:tr h="457200">
+              <a:tr h="420624">
                 <a:tc>
                   <a:txBody>
                     <a:bodyPr wrap="square"/>
                     <a:lstStyle/>
                     <a:p>
                       <a:r>
-                        <a:rPr sz="1400" b="0">
+                        <a:rPr sz="1300" b="0">
                           <a:solidFill>
                             <a:srgbClr val="101426"/>
                           </a:solidFill>
@@ -9550,7 +9618,7 @@
                     <a:lstStyle/>
                     <a:p>
                       <a:r>
-                        <a:rPr sz="1400" b="0">
+                        <a:rPr sz="1300" b="0">
                           <a:solidFill>
                             <a:srgbClr val="101426"/>
                           </a:solidFill>
@@ -9572,7 +9640,7 @@
                     <a:lstStyle/>
                     <a:p>
                       <a:r>
-                        <a:rPr sz="1400" b="0">
+                        <a:rPr sz="1300" b="0">
                           <a:solidFill>
                             <a:srgbClr val="101426"/>
                           </a:solidFill>
@@ -9589,14 +9657,14 @@
                   </a:tcPr>
                 </a:tc>
               </a:tr>
-              <a:tr h="457200">
+              <a:tr h="420624">
                 <a:tc>
                   <a:txBody>
                     <a:bodyPr wrap="square"/>
                     <a:lstStyle/>
                     <a:p>
                       <a:r>
-                        <a:rPr sz="1400" b="0">
+                        <a:rPr sz="1300" b="0">
                           <a:solidFill>
                             <a:srgbClr val="101426"/>
                           </a:solidFill>
@@ -9618,7 +9686,7 @@
                     <a:lstStyle/>
                     <a:p>
                       <a:r>
-                        <a:rPr sz="1400" b="0">
+                        <a:rPr sz="1300" b="0">
                           <a:solidFill>
                             <a:srgbClr val="101426"/>
                           </a:solidFill>
@@ -9640,7 +9708,7 @@
                     <a:lstStyle/>
                     <a:p>
                       <a:r>
-                        <a:rPr sz="1400" b="0">
+                        <a:rPr sz="1300" b="0">
                           <a:solidFill>
                             <a:srgbClr val="101426"/>
                           </a:solidFill>
@@ -9657,14 +9725,14 @@
                   </a:tcPr>
                 </a:tc>
               </a:tr>
-              <a:tr h="457200">
+              <a:tr h="420624">
                 <a:tc>
                   <a:txBody>
                     <a:bodyPr wrap="square"/>
                     <a:lstStyle/>
                     <a:p>
                       <a:r>
-                        <a:rPr sz="1400" b="0">
+                        <a:rPr sz="1300" b="0">
                           <a:solidFill>
                             <a:srgbClr val="101426"/>
                           </a:solidFill>
@@ -9686,7 +9754,7 @@
                     <a:lstStyle/>
                     <a:p>
                       <a:r>
-                        <a:rPr sz="1400" b="0">
+                        <a:rPr sz="1300" b="0">
                           <a:solidFill>
                             <a:srgbClr val="101426"/>
                           </a:solidFill>
@@ -9708,7 +9776,7 @@
                     <a:lstStyle/>
                     <a:p>
                       <a:r>
-                        <a:rPr sz="1400" b="0">
+                        <a:rPr sz="1300" b="0">
                           <a:solidFill>
                             <a:srgbClr val="101426"/>
                           </a:solidFill>
@@ -9725,14 +9793,14 @@
                   </a:tcPr>
                 </a:tc>
               </a:tr>
-              <a:tr h="457200">
+              <a:tr h="420624">
                 <a:tc>
                   <a:txBody>
                     <a:bodyPr wrap="square"/>
                     <a:lstStyle/>
                     <a:p>
                       <a:r>
-                        <a:rPr sz="1400" b="1">
+                        <a:rPr sz="1300" b="1">
                           <a:solidFill>
                             <a:srgbClr val="101426"/>
                           </a:solidFill>
@@ -9756,7 +9824,7 @@
                     <a:lstStyle/>
                     <a:p>
                       <a:r>
-                        <a:rPr sz="1400" b="1">
+                        <a:rPr sz="1300" b="1">
                           <a:solidFill>
                             <a:srgbClr val="101426"/>
                           </a:solidFill>
@@ -9780,7 +9848,7 @@
                     <a:lstStyle/>
                     <a:p>
                       <a:r>
-                        <a:rPr sz="1400" b="1">
+                        <a:rPr sz="1300" b="1">
                           <a:solidFill>
                             <a:srgbClr val="101426"/>
                           </a:solidFill>
@@ -9805,14 +9873,14 @@
       </p:graphicFrame>
       <p:sp>
         <p:nvSpPr>
-          <p:cNvPr id="4" name="TextBox 3"/>
+          <p:cNvPr id="6" name="TextBox 5"/>
           <p:cNvSpPr txBox="1"/>
           <p:nvPr/>
         </p:nvSpPr>
         <p:spPr>
           <a:xfrm>
-            <a:off x="502920" y="3703320"/>
-            <a:ext cx="5074920" cy="1280160"/>
+            <a:off x="4069080" y="3611880"/>
+            <a:ext cx="3977639" cy="1828800"/>
           </a:xfrm>
           <a:prstGeom prst="rect">
             <a:avLst/>
@@ -9856,7 +9924,7 @@
               <a:t>c</a:t>
             </a:r>
             <a:r>
-              <a:rPr sz="1600" b="0">
+              <a:rPr sz="1600" b="1">
                 <a:solidFill>
                   <a:srgbClr val="101426"/>
                 </a:solidFill>
@@ -9864,21 +9932,42 @@
                 <a:ea typeface="Yu Gothic"/>
                 <a:cs typeface="Yu Gothic"/>
               </a:rPr>
-              <a:t> は最高の圧力にはない。実験の現実味がある超水素化物は 100 GPa 前後に集中する。</a:t>
+              <a:t> は最高の圧力にはない。</a:t>
+            </a:r>
+          </a:p>
+          <a:p>
+            <a:pPr>
+              <a:lnSpc>
+                <a:spcPct val="125000"/>
+              </a:lnSpc>
+              <a:spcAft>
+                <a:spcPts val="1000"/>
+              </a:spcAft>
+            </a:pPr>
+            <a:r>
+              <a:rPr sz="1600" b="0">
+                <a:solidFill>
+                  <a:srgbClr val="101426"/>
+                </a:solidFill>
+                <a:latin typeface="Yu Gothic"/>
+                <a:ea typeface="Yu Gothic"/>
+                <a:cs typeface="Yu Gothic"/>
+              </a:rPr>
+              <a:t>実験の現実味がある超水素化物は 100 GPa 前後に集中する。よく特性の分かった DAC で届く圧力帯である。</a:t>
             </a:r>
           </a:p>
         </p:txBody>
       </p:sp>
       <p:sp>
         <p:nvSpPr>
-          <p:cNvPr id="5" name="TextBox 4"/>
+          <p:cNvPr id="7" name="TextBox 6"/>
           <p:cNvSpPr txBox="1"/>
           <p:nvPr/>
         </p:nvSpPr>
         <p:spPr>
           <a:xfrm>
-            <a:off x="6492240" y="1234440"/>
-            <a:ext cx="5212079" cy="4754880"/>
+            <a:off x="8366760" y="1188720"/>
+            <a:ext cx="3337560" cy="4572000"/>
           </a:xfrm>
           <a:prstGeom prst="rect">
             <a:avLst/>
@@ -9900,7 +9989,7 @@
               </a:spcAft>
             </a:pPr>
             <a:r>
-              <a:rPr sz="1700" b="1">
+              <a:rPr sz="1600" b="1">
                 <a:solidFill>
                   <a:srgbClr val="101426"/>
                 </a:solidFill>
@@ -9911,7 +10000,7 @@
               <a:t>試料が小さすぎる。</a:t>
             </a:r>
             <a:r>
-              <a:rPr sz="1700" b="0">
+              <a:rPr sz="1600" b="0">
                 <a:solidFill>
                   <a:srgbClr val="101426"/>
                 </a:solidFill>
@@ -9919,7 +10008,7 @@
                 <a:ea typeface="Yu Gothic"/>
                 <a:cs typeface="Yu Gothic"/>
               </a:rPr>
-              <a:t>120 GPa のキュレットは数十 µm、試料体積は pL。バルク磁化測定ではアンビルとガスケットの背景から分離できない。</a:t>
+              <a:t>数十 µm・pL の試料の磁化を、バルク測定でアンビルとガスケットの背景から分離することはできない。</a:t>
             </a:r>
           </a:p>
           <a:p>
@@ -9932,7 +10021,7 @@
               </a:spcAft>
             </a:pPr>
             <a:r>
-              <a:rPr sz="1700" b="1">
+              <a:rPr sz="1600" b="1">
                 <a:solidFill>
                   <a:srgbClr val="101426"/>
                 </a:solidFill>
@@ -9943,7 +10032,7 @@
               <a:t>抵抗の落下だけでは決着しない。</a:t>
             </a:r>
             <a:r>
-              <a:rPr sz="1700" b="0">
+              <a:rPr sz="1600" b="0">
                 <a:solidFill>
                   <a:srgbClr val="101426"/>
                 </a:solidFill>
@@ -9951,7 +10040,7 @@
                 <a:ea typeface="Yu Gothic"/>
                 <a:cs typeface="Yu Gothic"/>
               </a:rPr>
-              <a:t>必要なのは磁束排除そのものの観測であり、局所・空間分解された磁気測定が決着をつける測定になった。</a:t>
+              <a:t>この分野は繰り返しそれを経験してきた。必要なのは磁束排除そのものの観測である。</a:t>
             </a:r>
           </a:p>
           <a:p>
@@ -9964,7 +10053,7 @@
               </a:spcAft>
             </a:pPr>
             <a:r>
-              <a:rPr sz="1700" b="1">
+              <a:rPr sz="1600" b="0">
                 <a:solidFill>
                   <a:srgbClr val="101426"/>
                 </a:solidFill>
@@ -9972,10 +10061,10 @@
                 <a:ea typeface="Yu Gothic"/>
                 <a:cs typeface="Yu Gothic"/>
               </a:rPr>
-              <a:t>探針はアンビルの内側に作る。</a:t>
-            </a:r>
-            <a:r>
-              <a:rPr sz="1700" b="0">
+              <a:t>だから決着をつける測定は、</a:t>
+            </a:r>
+            <a:r>
+              <a:rPr sz="1600" b="1">
                 <a:solidFill>
                   <a:srgbClr val="101426"/>
                 </a:solidFill>
@@ -9983,14 +10072,25 @@
                 <a:ea typeface="Yu Gothic"/>
                 <a:cs typeface="Yu Gothic"/>
               </a:rPr>
-              <a:t>キュレット表面の数十 nm 下に注入された NV は試料から µm の距離にあり、同じ圧力を経験する。ODMR が局所磁場と局所応力を同時に読み出す。</a:t>
+              <a:t>局所・空間分解された磁気測定</a:t>
+            </a:r>
+            <a:r>
+              <a:rPr sz="1600" b="0">
+                <a:solidFill>
+                  <a:srgbClr val="101426"/>
+                </a:solidFill>
+                <a:latin typeface="Yu Gothic"/>
+                <a:ea typeface="Yu Gothic"/>
+                <a:cs typeface="Yu Gothic"/>
+              </a:rPr>
+              <a:t>になった。</a:t>
             </a:r>
           </a:p>
         </p:txBody>
       </p:sp>
       <p:sp>
         <p:nvSpPr>
-          <p:cNvPr id="6" name="TextBox 5"/>
+          <p:cNvPr id="8" name="TextBox 7"/>
           <p:cNvSpPr txBox="1"/>
           <p:nvPr/>
         </p:nvSpPr>
@@ -10027,7 +10127,7 @@
                 <a:ea typeface="Yu Gothic"/>
                 <a:cs typeface="Yu Gothic"/>
               </a:rPr>
-              <a:t>A. P. Drozdov et al., Nature 525, 73 (2015) / 569, 528 (2019);  N. P. Salke et al., Nat. Commun. 10, 4453 (2019);  J. Bi et al., Nat. Commun. 13, 5952 (2022);  P. Bhattacharyya et al., Nature 627, 73 (2024).</a:t>
+              <a:t>図: P. Bhattacharyya, PhD thesis, UC Berkeley (2022), Fig. 2.2.  データ: A. P. Drozdov et al., Nature 525, 73 (2015) / 569, 528 (2019);  N. P. Salke et al., Nat. Commun. 10, 4453 (2019);  J. Bi et al., Nat. Commun. 13, 5952 (2022).</a:t>
             </a:r>
           </a:p>
         </p:txBody>
@@ -10074,21 +10174,135 @@
                 <a:ea typeface="Yu Gothic"/>
                 <a:cs typeface="Yu Gothic"/>
               </a:rPr>
-              <a:t>感度が空間分解能と (P, T) 点数を決める</a:t>
+              <a:t>アンビルの内側の NV が、局所の磁束排除を撮る</a:t>
             </a:r>
           </a:p>
         </p:txBody>
       </p:sp>
-      <p:sp>
-        <p:nvSpPr>
-          <p:cNvPr id="3" name="Rectangle 2"/>
+      <p:pic>
+        <p:nvPicPr>
+          <p:cNvPr id="3" name="Picture 2" descr="lit_nv_in_anvil.png"/>
+          <p:cNvPicPr>
+            <a:picLocks noChangeAspect="1"/>
+          </p:cNvPicPr>
+          <p:nvPr/>
+        </p:nvPicPr>
+        <p:blipFill>
+          <a:blip r:embed="rId2"/>
+          <a:stretch>
+            <a:fillRect/>
+          </a:stretch>
+        </p:blipFill>
+        <p:spPr>
+          <a:xfrm>
+            <a:off x="640080" y="1188720"/>
+            <a:ext cx="1783080" cy="2026623"/>
+          </a:xfrm>
+          <a:prstGeom prst="rect">
+            <a:avLst/>
+          </a:prstGeom>
+        </p:spPr>
+      </p:pic>
+      <p:pic>
+        <p:nvPicPr>
+          <p:cNvPr id="4" name="Picture 3" descr="lit_meissner_map.png"/>
+          <p:cNvPicPr>
+            <a:picLocks noChangeAspect="1"/>
+          </p:cNvPicPr>
+          <p:nvPr/>
+        </p:nvPicPr>
+        <p:blipFill>
+          <a:blip r:embed="rId3"/>
+          <a:stretch>
+            <a:fillRect/>
+          </a:stretch>
+        </p:blipFill>
+        <p:spPr>
+          <a:xfrm>
+            <a:off x="2606040" y="1298448"/>
+            <a:ext cx="5257800" cy="1983744"/>
+          </a:xfrm>
+          <a:prstGeom prst="rect">
+            <a:avLst/>
+          </a:prstGeom>
+        </p:spPr>
+      </p:pic>
+      <p:sp>
+        <p:nvSpPr>
+          <p:cNvPr id="5" name="TextBox 4"/>
+          <p:cNvSpPr txBox="1"/>
+          <p:nvPr/>
+        </p:nvSpPr>
+        <p:spPr>
+          <a:xfrm>
+            <a:off x="502920" y="3520440"/>
+            <a:ext cx="7406640" cy="548640"/>
+          </a:xfrm>
+          <a:prstGeom prst="rect">
+            <a:avLst/>
+          </a:prstGeom>
+          <a:noFill/>
+        </p:spPr>
+        <p:txBody>
+          <a:bodyPr wrap="square" lIns="0" rIns="0" tIns="0" bIns="0">
+            <a:spAutoFit/>
+          </a:bodyPr>
+          <a:lstStyle/>
+          <a:p>
+            <a:pPr>
+              <a:lnSpc>
+                <a:spcPct val="125000"/>
+              </a:lnSpc>
+              <a:spcAft>
+                <a:spcPts val="1000"/>
+              </a:spcAft>
+            </a:pPr>
+            <a:r>
+              <a:rPr sz="1400" b="0">
+                <a:solidFill>
+                  <a:srgbClr val="6E7488"/>
+                </a:solidFill>
+                <a:latin typeface="Yu Gothic"/>
+                <a:ea typeface="Yu Gothic"/>
+                <a:cs typeface="Yu Gothic"/>
+              </a:rPr>
+              <a:t>先行研究の実測。(左) NV はキュレット表面の 50 nm 下に注入され、試料から µm の距離で同じ圧力を経験する。(中央・右) CeH</a:t>
+            </a:r>
+            <a:r>
+              <a:rPr sz="1400" b="0" baseline="-25000">
+                <a:solidFill>
+                  <a:srgbClr val="6E7488"/>
+                </a:solidFill>
+                <a:latin typeface="Yu Gothic"/>
+                <a:ea typeface="Yu Gothic"/>
+                <a:cs typeface="Yu Gothic"/>
+              </a:rPr>
+              <a:t>9</a:t>
+            </a:r>
+            <a:r>
+              <a:rPr sz="1400" b="0">
+                <a:solidFill>
+                  <a:srgbClr val="6E7488"/>
+                </a:solidFill>
+                <a:latin typeface="Yu Gothic"/>
+                <a:ea typeface="Yu Gothic"/>
+                <a:cs typeface="Yu Gothic"/>
+              </a:rPr>
+              <a:t> 上で磁場比 B/H が 0.67 まで落ちる = 局所の磁束排除。しかも ~10 µm で不均一。</a:t>
+            </a:r>
+          </a:p>
+        </p:txBody>
+      </p:sp>
+      <p:sp>
+        <p:nvSpPr>
+          <p:cNvPr id="6" name="Rectangle 5"/>
           <p:cNvSpPr/>
           <p:nvPr/>
         </p:nvSpPr>
         <p:spPr>
           <a:xfrm>
-            <a:off x="502920" y="1417320"/>
-            <a:ext cx="6035040" cy="1051560"/>
+            <a:off x="502920" y="4526280"/>
+            <a:ext cx="4846320" cy="868680"/>
           </a:xfrm>
           <a:prstGeom prst="rect">
             <a:avLst/>
@@ -10121,7 +10335,7 @@
           <a:p>
             <a:pPr algn="ctr"/>
             <a:r>
-              <a:rPr sz="2600" b="0">
+              <a:rPr sz="2200" b="0">
                 <a:solidFill>
                   <a:srgbClr val="101426"/>
                 </a:solidFill>
@@ -10132,7 +10346,7 @@
               <a:t>測定時間  ∝  画素数 / η</a:t>
             </a:r>
             <a:r>
-              <a:rPr sz="2600" b="0" baseline="-25000">
+              <a:rPr sz="2200" b="0" baseline="-25000">
                 <a:solidFill>
                   <a:srgbClr val="101426"/>
                 </a:solidFill>
@@ -10143,7 +10357,7 @@
               <a:t>B</a:t>
             </a:r>
             <a:r>
-              <a:rPr sz="2600" b="0" baseline="30000">
+              <a:rPr sz="2200" b="0" baseline="30000">
                 <a:solidFill>
                   <a:srgbClr val="101426"/>
                 </a:solidFill>
@@ -10158,14 +10372,14 @@
       </p:sp>
       <p:sp>
         <p:nvSpPr>
-          <p:cNvPr id="4" name="TextBox 3"/>
+          <p:cNvPr id="7" name="TextBox 6"/>
           <p:cNvSpPr txBox="1"/>
           <p:nvPr/>
         </p:nvSpPr>
         <p:spPr>
           <a:xfrm>
-            <a:off x="502920" y="2880360"/>
-            <a:ext cx="6492240" cy="2926080"/>
+            <a:off x="5669280" y="4526280"/>
+            <a:ext cx="2194560" cy="914400"/>
           </a:xfrm>
           <a:prstGeom prst="rect">
             <a:avLst/>
@@ -10187,7 +10401,7 @@
               </a:spcAft>
             </a:pPr>
             <a:r>
-              <a:rPr sz="1800" b="0">
+              <a:rPr sz="1500" b="0">
                 <a:solidFill>
                   <a:srgbClr val="101426"/>
                 </a:solidFill>
@@ -10195,129 +10409,21 @@
                 <a:ea typeface="Yu Gothic"/>
                 <a:cs typeface="Yu Gothic"/>
               </a:rPr>
-              <a:t>水素化物超伝導の決定実験は</a:t>
-            </a:r>
-            <a:r>
-              <a:rPr sz="1800" b="1">
-                <a:solidFill>
-                  <a:srgbClr val="101426"/>
-                </a:solidFill>
-                <a:latin typeface="Yu Gothic"/>
-                <a:ea typeface="Yu Gothic"/>
-                <a:cs typeface="Yu Gothic"/>
-              </a:rPr>
-              <a:t>局所磁気マップ</a:t>
-            </a:r>
-            <a:r>
-              <a:rPr sz="1800" b="0">
-                <a:solidFill>
-                  <a:srgbClr val="101426"/>
-                </a:solidFill>
-                <a:latin typeface="Yu Gothic"/>
-                <a:ea typeface="Yu Gothic"/>
-                <a:cs typeface="Yu Gothic"/>
-              </a:rPr>
-              <a:t>になった。</a:t>
-            </a:r>
-          </a:p>
-          <a:p>
-            <a:pPr>
-              <a:lnSpc>
-                <a:spcPct val="125000"/>
-              </a:lnSpc>
-              <a:spcAft>
-                <a:spcPts val="1000"/>
-              </a:spcAft>
-            </a:pPr>
-            <a:r>
-              <a:rPr sz="1800" b="0">
-                <a:solidFill>
-                  <a:srgbClr val="101426"/>
-                </a:solidFill>
-                <a:latin typeface="Yu Gothic"/>
-                <a:ea typeface="Yu Gothic"/>
-                <a:cs typeface="Yu Gothic"/>
-              </a:rPr>
-              <a:t>CeH</a:t>
-            </a:r>
-            <a:r>
-              <a:rPr sz="1800" b="0" baseline="-25000">
-                <a:solidFill>
-                  <a:srgbClr val="101426"/>
-                </a:solidFill>
-                <a:latin typeface="Yu Gothic"/>
-                <a:ea typeface="Yu Gothic"/>
-                <a:cs typeface="Yu Gothic"/>
-              </a:rPr>
-              <a:t>9</a:t>
-            </a:r>
-            <a:r>
-              <a:rPr sz="1800" b="0">
-                <a:solidFill>
-                  <a:srgbClr val="101426"/>
-                </a:solidFill>
-                <a:latin typeface="Yu Gothic"/>
-                <a:ea typeface="Yu Gothic"/>
-                <a:cs typeface="Yu Gothic"/>
-              </a:rPr>
-              <a:t> の Meissner 効果は、超伝導領域がミクロンスケールで強く不均一であることを示した。</a:t>
-            </a:r>
-          </a:p>
-          <a:p>
-            <a:pPr>
-              <a:lnSpc>
-                <a:spcPct val="125000"/>
-              </a:lnSpc>
-              <a:spcAft>
-                <a:spcPts val="1000"/>
-              </a:spcAft>
-            </a:pPr>
-            <a:r>
-              <a:rPr sz="1800" b="0">
-                <a:solidFill>
-                  <a:srgbClr val="101426"/>
-                </a:solidFill>
-                <a:latin typeface="Yu Gothic"/>
-                <a:ea typeface="Yu Gothic"/>
-                <a:cs typeface="Yu Gothic"/>
-              </a:rPr>
-              <a:t>1 回のロードに数週間、1 回のアンビル破損で全損する領域では、</a:t>
-            </a:r>
-            <a:r>
-              <a:rPr sz="1800" b="1">
-                <a:solidFill>
-                  <a:srgbClr val="101426"/>
-                </a:solidFill>
-                <a:latin typeface="Yu Gothic"/>
-                <a:ea typeface="Yu Gothic"/>
-                <a:cs typeface="Yu Gothic"/>
-              </a:rPr>
-              <a:t>感度は空間分解能・視野・到達できる (P, T) 点数を買う通貨</a:t>
-            </a:r>
-            <a:r>
-              <a:rPr sz="1800" b="0">
-                <a:solidFill>
-                  <a:srgbClr val="101426"/>
-                </a:solidFill>
-                <a:latin typeface="Yu Gothic"/>
-                <a:ea typeface="Yu Gothic"/>
-                <a:cs typeface="Yu Gothic"/>
-              </a:rPr>
-              <a:t>である。</a:t>
+              <a:t>マップは ODMR スペクトルのラスタである。</a:t>
             </a:r>
           </a:p>
         </p:txBody>
       </p:sp>
       <p:sp>
         <p:nvSpPr>
-          <p:cNvPr id="5" name="TextBox 4"/>
+          <p:cNvPr id="8" name="TextBox 7"/>
           <p:cNvSpPr txBox="1"/>
           <p:nvPr/>
         </p:nvSpPr>
         <p:spPr>
           <a:xfrm>
-            <a:off x="8275319" y="1417320"/>
-            <a:ext cx="3794759" cy="1097280"/>
+            <a:off x="8138159" y="1325880"/>
+            <a:ext cx="3977639" cy="4572000"/>
           </a:xfrm>
           <a:prstGeom prst="rect">
             <a:avLst/>
@@ -10335,11 +10441,108 @@
                 <a:spcPct val="125000"/>
               </a:lnSpc>
               <a:spcAft>
-                <a:spcPts val="200"/>
+                <a:spcPts val="1000"/>
               </a:spcAft>
             </a:pPr>
             <a:r>
-              <a:rPr sz="4000" b="1">
+              <a:rPr sz="1600" b="1">
+                <a:solidFill>
+                  <a:srgbClr val="101426"/>
+                </a:solidFill>
+                <a:latin typeface="Yu Gothic"/>
+                <a:ea typeface="Yu Gothic"/>
+                <a:cs typeface="Yu Gothic"/>
+              </a:rPr>
+              <a:t>科学的な中身はマップにある。</a:t>
+            </a:r>
+            <a:r>
+              <a:rPr sz="1600" b="0">
+                <a:solidFill>
+                  <a:srgbClr val="101426"/>
+                </a:solidFill>
+                <a:latin typeface="Yu Gothic"/>
+                <a:ea typeface="Yu Gothic"/>
+                <a:cs typeface="Yu Gothic"/>
+              </a:rPr>
+              <a:t>遮蔽場のテクスチャ、捕捉磁束の幾何、そしてその T</a:t>
+            </a:r>
+            <a:r>
+              <a:rPr sz="1600" b="0" baseline="-25000">
+                <a:solidFill>
+                  <a:srgbClr val="101426"/>
+                </a:solidFill>
+                <a:latin typeface="Yu Gothic"/>
+                <a:ea typeface="Yu Gothic"/>
+                <a:cs typeface="Yu Gothic"/>
+              </a:rPr>
+              <a:t>c</a:t>
+            </a:r>
+            <a:r>
+              <a:rPr sz="1600" b="0">
+                <a:solidFill>
+                  <a:srgbClr val="101426"/>
+                </a:solidFill>
+                <a:latin typeface="Yu Gothic"/>
+                <a:ea typeface="Yu Gothic"/>
+                <a:cs typeface="Yu Gothic"/>
+              </a:rPr>
+              <a:t> 近傍・圧力に沿った発展。</a:t>
+            </a:r>
+          </a:p>
+          <a:p>
+            <a:pPr>
+              <a:lnSpc>
+                <a:spcPct val="125000"/>
+              </a:lnSpc>
+              <a:spcAft>
+                <a:spcPts val="1000"/>
+              </a:spcAft>
+            </a:pPr>
+            <a:r>
+              <a:rPr sz="1600" b="0">
+                <a:solidFill>
+                  <a:srgbClr val="101426"/>
+                </a:solidFill>
+                <a:latin typeface="Yu Gothic"/>
+                <a:ea typeface="Yu Gothic"/>
+                <a:cs typeface="Yu Gothic"/>
+              </a:rPr>
+              <a:t>1 回のロードに数週間、1 回のアンビル破損で全損する領域では、</a:t>
+            </a:r>
+            <a:r>
+              <a:rPr sz="1600" b="1">
+                <a:solidFill>
+                  <a:srgbClr val="101426"/>
+                </a:solidFill>
+                <a:latin typeface="Yu Gothic"/>
+                <a:ea typeface="Yu Gothic"/>
+                <a:cs typeface="Yu Gothic"/>
+              </a:rPr>
+              <a:t>感度は空間分解能・視野・到達できる (P, T) 点数を買う通貨</a:t>
+            </a:r>
+            <a:r>
+              <a:rPr sz="1600" b="0">
+                <a:solidFill>
+                  <a:srgbClr val="101426"/>
+                </a:solidFill>
+                <a:latin typeface="Yu Gothic"/>
+                <a:ea typeface="Yu Gothic"/>
+                <a:cs typeface="Yu Gothic"/>
+              </a:rPr>
+              <a:t>である。</a:t>
+            </a:r>
+          </a:p>
+          <a:p>
+            <a:pPr>
+              <a:lnSpc>
+                <a:spcPct val="125000"/>
+              </a:lnSpc>
+              <a:spcAft>
+                <a:spcPts val="1000"/>
+              </a:spcAft>
+            </a:pPr>
+            <a:r>
+              <a:rPr sz="3400" b="1">
                 <a:solidFill>
                   <a:srgbClr val="1C3177"/>
                 </a:solidFill>
@@ -10349,6 +10552,17 @@
               </a:rPr>
               <a:t>×2.7</a:t>
             </a:r>
+            <a:r>
+              <a:rPr sz="1500" b="0">
+                <a:solidFill>
+                  <a:srgbClr val="6E7488"/>
+                </a:solidFill>
+                <a:latin typeface="Yu Gothic"/>
+                <a:ea typeface="Yu Gothic"/>
+                <a:cs typeface="Yu Gothic"/>
+              </a:rPr>
+              <a:t>  感度</a:t>
+            </a:r>
           </a:p>
           <a:p>
             <a:pPr>
@@ -10356,55 +10570,11 @@
                 <a:spcPct val="125000"/>
               </a:lnSpc>
               <a:spcAft>
-                <a:spcPts val="200"/>
+                <a:spcPts val="1000"/>
               </a:spcAft>
             </a:pPr>
             <a:r>
-              <a:rPr sz="1500" b="0">
-                <a:solidFill>
-                  <a:srgbClr val="6E7488"/>
-                </a:solidFill>
-                <a:latin typeface="Yu Gothic"/>
-                <a:ea typeface="Yu Gothic"/>
-                <a:cs typeface="Yu Gothic"/>
-              </a:rPr>
-              <a:t>感度</a:t>
-            </a:r>
-          </a:p>
-        </p:txBody>
-      </p:sp>
-      <p:sp>
-        <p:nvSpPr>
-          <p:cNvPr id="6" name="TextBox 5"/>
-          <p:cNvSpPr txBox="1"/>
-          <p:nvPr/>
-        </p:nvSpPr>
-        <p:spPr>
-          <a:xfrm>
-            <a:off x="8275319" y="2697480"/>
-            <a:ext cx="3794759" cy="1097280"/>
-          </a:xfrm>
-          <a:prstGeom prst="rect">
-            <a:avLst/>
-          </a:prstGeom>
-          <a:noFill/>
-        </p:spPr>
-        <p:txBody>
-          <a:bodyPr wrap="square" lIns="0" rIns="0" tIns="0" bIns="0">
-            <a:spAutoFit/>
-          </a:bodyPr>
-          <a:lstStyle/>
-          <a:p>
-            <a:pPr>
-              <a:lnSpc>
-                <a:spcPct val="125000"/>
-              </a:lnSpc>
-              <a:spcAft>
-                <a:spcPts val="200"/>
-              </a:spcAft>
-            </a:pPr>
-            <a:r>
-              <a:rPr sz="4000" b="1">
+              <a:rPr sz="3400" b="1">
                 <a:solidFill>
                   <a:srgbClr val="1C3177"/>
                 </a:solidFill>
@@ -10414,16 +10584,6 @@
               </a:rPr>
               <a:t>×7</a:t>
             </a:r>
-          </a:p>
-          <a:p>
-            <a:pPr>
-              <a:lnSpc>
-                <a:spcPct val="125000"/>
-              </a:lnSpc>
-              <a:spcAft>
-                <a:spcPts val="200"/>
-              </a:spcAft>
-            </a:pPr>
             <a:r>
               <a:rPr sz="1500" b="0">
                 <a:solidFill>
@@ -10433,14 +10593,14 @@
                 <a:ea typeface="Yu Gothic"/>
                 <a:cs typeface="Yu Gothic"/>
               </a:rPr>
-              <a:t>マップ 1 枚の取得時間</a:t>
+              <a:t>  マップ 1 枚の取得時間</a:t>
             </a:r>
           </a:p>
         </p:txBody>
       </p:sp>
       <p:sp>
         <p:nvSpPr>
-          <p:cNvPr id="7" name="TextBox 6"/>
+          <p:cNvPr id="9" name="TextBox 8"/>
           <p:cNvSpPr txBox="1"/>
           <p:nvPr/>
         </p:nvSpPr>
@@ -10477,7 +10637,7 @@
                 <a:ea typeface="Yu Gothic"/>
                 <a:cs typeface="Yu Gothic"/>
               </a:rPr>
-              <a:t>P. Bhattacharyya et al., Nature 627, 73 (2024);  J. F. Barry et al., Rev. Mod. Phys. 92, 015004 (2020)</a:t>
+              <a:t>図: P. Bhattacharyya, PhD thesis, UC Berkeley (2022), Fig. 7.2(a), 7.8(b,c);  同グループの成果は P. Bhattacharyya et al., Nature 627, 73 (2024).  J. F. Barry et al., Rev. Mod. Phys. 92, 015004 (2020).</a:t>
             </a:r>
           </a:p>
         </p:txBody>
